--- a/SIM-Tema-4/Actividad 4.2 Reporte de Practica_CynthiaMorales_SIM_7ISCM.pptx
+++ b/SIM-Tema-4/Actividad 4.2 Reporte de Practica_CynthiaMorales_SIM_7ISCM.pptx
@@ -5,7 +5,7 @@
     <p:sldMasterId id="2147483648" r:id="rId1"/>
   </p:sldMasterIdLst>
   <p:notesMasterIdLst>
-    <p:notesMasterId r:id="rId14"/>
+    <p:notesMasterId r:id="rId15"/>
   </p:notesMasterIdLst>
   <p:sldIdLst>
     <p:sldId id="267" r:id="rId2"/>
@@ -20,6 +20,7 @@
     <p:sldId id="264" r:id="rId11"/>
     <p:sldId id="265" r:id="rId12"/>
     <p:sldId id="266" r:id="rId13"/>
+    <p:sldId id="268" r:id="rId14"/>
   </p:sldIdLst>
   <p:sldSz cx="12192000" cy="6858000"/>
   <p:notesSz cx="6858000" cy="12192000"/>
@@ -1440,7 +1441,7 @@
           </a:prstGeom>
           <a:extLst>
             <a:ext uri="{C572A759-6A51-4108-AA02-DFA0A04FC94B}">
-              <ma14:wrappingTextBoxFlag xmlns:ma14="http://schemas.microsoft.com/office/mac/drawingml/2011/main" xmlns="" val="0"/>
+              <ma14:wrappingTextBoxFlag xmlns="" xmlns:ma14="http://schemas.microsoft.com/office/mac/drawingml/2011/main" val="0"/>
             </a:ext>
           </a:extLst>
         </p:spPr>
@@ -1518,7 +1519,7 @@
           </a:prstGeom>
           <a:extLst>
             <a:ext uri="{C572A759-6A51-4108-AA02-DFA0A04FC94B}">
-              <ma14:wrappingTextBoxFlag xmlns:ma14="http://schemas.microsoft.com/office/mac/drawingml/2011/main" xmlns="" val="0"/>
+              <ma14:wrappingTextBoxFlag xmlns="" xmlns:ma14="http://schemas.microsoft.com/office/mac/drawingml/2011/main" val="0"/>
             </a:ext>
           </a:extLst>
         </p:spPr>
@@ -3357,7 +3358,7 @@
           </a:prstGeom>
           <a:extLst>
             <a:ext uri="{C572A759-6A51-4108-AA02-DFA0A04FC94B}">
-              <ma14:wrappingTextBoxFlag xmlns:ma14="http://schemas.microsoft.com/office/mac/drawingml/2011/main" xmlns="" val="0"/>
+              <ma14:wrappingTextBoxFlag xmlns="" xmlns:ma14="http://schemas.microsoft.com/office/mac/drawingml/2011/main" val="0"/>
             </a:ext>
           </a:extLst>
         </p:spPr>
@@ -5210,7 +5211,7 @@
           </a:prstGeom>
           <a:extLst>
             <a:ext uri="{C572A759-6A51-4108-AA02-DFA0A04FC94B}">
-              <ma14:wrappingTextBoxFlag xmlns:ma14="http://schemas.microsoft.com/office/mac/drawingml/2011/main" xmlns="" val="0"/>
+              <ma14:wrappingTextBoxFlag xmlns="" xmlns:ma14="http://schemas.microsoft.com/office/mac/drawingml/2011/main" val="0"/>
             </a:ext>
           </a:extLst>
         </p:spPr>
@@ -5742,6 +5743,409 @@
 </p:sld>
 </file>
 
+<file path=ppt/slides/slide13.xml><?xml version="1.0" encoding="utf-8"?>
+<p:sld xmlns:a="http://schemas.openxmlformats.org/drawingml/2006/main" xmlns:r="http://schemas.openxmlformats.org/officeDocument/2006/relationships" xmlns:p="http://schemas.openxmlformats.org/presentationml/2006/main">
+  <p:cSld>
+    <p:spTree>
+      <p:nvGrpSpPr>
+        <p:cNvPr id="1" name=""/>
+        <p:cNvGrpSpPr/>
+        <p:nvPr/>
+      </p:nvGrpSpPr>
+      <p:grpSpPr>
+        <a:xfrm>
+          <a:off x="0" y="0"/>
+          <a:ext cx="0" cy="0"/>
+          <a:chOff x="0" y="0"/>
+          <a:chExt cx="0" cy="0"/>
+        </a:xfrm>
+      </p:grpSpPr>
+      <p:sp>
+        <p:nvSpPr>
+          <p:cNvPr id="2" name="Título 1">
+            <a:extLst>
+              <a:ext uri="{FF2B5EF4-FFF2-40B4-BE49-F238E27FC236}">
+                <a16:creationId xmlns:a16="http://schemas.microsoft.com/office/drawing/2014/main" id="{E8A497A8-0008-EF2B-3980-5FFB3DD7FC8D}"/>
+              </a:ext>
+            </a:extLst>
+          </p:cNvPr>
+          <p:cNvSpPr>
+            <a:spLocks noGrp="1"/>
+          </p:cNvSpPr>
+          <p:nvPr>
+            <p:ph type="title" idx="100"/>
+          </p:nvPr>
+        </p:nvSpPr>
+        <p:spPr/>
+        <p:txBody>
+          <a:bodyPr/>
+          <a:lstStyle/>
+          <a:p>
+            <a:r>
+              <a:rPr lang="es-MX" dirty="0"/>
+              <a:t>Anexo link de la actividad solicitada y enviada por </a:t>
+            </a:r>
+            <a:r>
+              <a:rPr lang="es-MX" dirty="0" err="1"/>
+              <a:t>github</a:t>
+            </a:r>
+            <a:r>
+              <a:rPr lang="es-MX" dirty="0"/>
+              <a:t>:</a:t>
+            </a:r>
+          </a:p>
+        </p:txBody>
+      </p:sp>
+      <p:sp>
+        <p:nvSpPr>
+          <p:cNvPr id="3" name="CuadroTexto 2">
+            <a:hlinkClick r:id="rId2"/>
+            <a:extLst>
+              <a:ext uri="{FF2B5EF4-FFF2-40B4-BE49-F238E27FC236}">
+                <a16:creationId xmlns:a16="http://schemas.microsoft.com/office/drawing/2014/main" id="{F605DA63-018D-7258-8CF5-43724E0986B4}"/>
+              </a:ext>
+            </a:extLst>
+          </p:cNvPr>
+          <p:cNvSpPr txBox="1"/>
+          <p:nvPr/>
+        </p:nvSpPr>
+        <p:spPr>
+          <a:xfrm>
+            <a:off x="421640" y="2187972"/>
+            <a:ext cx="11165840" cy="646331"/>
+          </a:xfrm>
+          <a:prstGeom prst="rect">
+            <a:avLst/>
+          </a:prstGeom>
+          <a:noFill/>
+        </p:spPr>
+        <p:txBody>
+          <a:bodyPr wrap="square" rtlCol="0">
+            <a:spAutoFit/>
+          </a:bodyPr>
+          <a:lstStyle/>
+          <a:p>
+            <a:r>
+              <a:rPr lang="es-MX" dirty="0">
+                <a:solidFill>
+                  <a:schemeClr val="bg1"/>
+                </a:solidFill>
+              </a:rPr>
+              <a:t>https</a:t>
+            </a:r>
+            <a:r>
+              <a:rPr lang="es-MX" sz="1600" dirty="0">
+                <a:solidFill>
+                  <a:schemeClr val="bg1"/>
+                </a:solidFill>
+              </a:rPr>
+              <a:t>://</a:t>
+            </a:r>
+            <a:r>
+              <a:rPr lang="es-MX" dirty="0">
+                <a:solidFill>
+                  <a:schemeClr val="bg1"/>
+                </a:solidFill>
+              </a:rPr>
+              <a:t>github.com/Cynthia21Morales/SIMULACION_CynthiaJasmineMT/blob/main/SIM-Tema-4/Actividad%204.2%20Reporte%20de%20Practica_CynthiaMorales_SIM_7ISCM.pptx</a:t>
+            </a:r>
+          </a:p>
+        </p:txBody>
+      </p:sp>
+      <p:sp>
+        <p:nvSpPr>
+          <p:cNvPr id="4" name="CuadroTexto 3">
+            <a:extLst>
+              <a:ext uri="{FF2B5EF4-FFF2-40B4-BE49-F238E27FC236}">
+                <a16:creationId xmlns:a16="http://schemas.microsoft.com/office/drawing/2014/main" id="{4F3B4639-87B9-C578-4CD1-6270AEDFF010}"/>
+              </a:ext>
+            </a:extLst>
+          </p:cNvPr>
+          <p:cNvSpPr txBox="1"/>
+          <p:nvPr/>
+        </p:nvSpPr>
+        <p:spPr>
+          <a:xfrm>
+            <a:off x="513080" y="1818640"/>
+            <a:ext cx="4607560" cy="369332"/>
+          </a:xfrm>
+          <a:prstGeom prst="rect">
+            <a:avLst/>
+          </a:prstGeom>
+          <a:noFill/>
+        </p:spPr>
+        <p:txBody>
+          <a:bodyPr wrap="square" rtlCol="0">
+            <a:spAutoFit/>
+          </a:bodyPr>
+          <a:lstStyle/>
+          <a:p>
+            <a:r>
+              <a:rPr lang="es-MX" dirty="0">
+                <a:solidFill>
+                  <a:schemeClr val="bg1"/>
+                </a:solidFill>
+              </a:rPr>
+              <a:t>Reporte de practica</a:t>
+            </a:r>
+          </a:p>
+        </p:txBody>
+      </p:sp>
+      <p:sp>
+        <p:nvSpPr>
+          <p:cNvPr id="5" name="CuadroTexto 4">
+            <a:extLst>
+              <a:ext uri="{FF2B5EF4-FFF2-40B4-BE49-F238E27FC236}">
+                <a16:creationId xmlns:a16="http://schemas.microsoft.com/office/drawing/2014/main" id="{AFF1F2A6-A70F-509D-4FFD-655AC1A90DEF}"/>
+              </a:ext>
+            </a:extLst>
+          </p:cNvPr>
+          <p:cNvSpPr txBox="1"/>
+          <p:nvPr/>
+        </p:nvSpPr>
+        <p:spPr>
+          <a:xfrm>
+            <a:off x="548640" y="4322360"/>
+            <a:ext cx="4607560" cy="369332"/>
+          </a:xfrm>
+          <a:prstGeom prst="rect">
+            <a:avLst/>
+          </a:prstGeom>
+          <a:noFill/>
+        </p:spPr>
+        <p:txBody>
+          <a:bodyPr wrap="square" rtlCol="0">
+            <a:spAutoFit/>
+          </a:bodyPr>
+          <a:lstStyle/>
+          <a:p>
+            <a:r>
+              <a:rPr lang="es-MX" dirty="0" err="1">
+                <a:solidFill>
+                  <a:schemeClr val="bg1"/>
+                </a:solidFill>
+              </a:rPr>
+              <a:t>python</a:t>
+            </a:r>
+            <a:endParaRPr lang="es-MX" dirty="0">
+              <a:solidFill>
+                <a:schemeClr val="bg1"/>
+              </a:solidFill>
+            </a:endParaRPr>
+          </a:p>
+        </p:txBody>
+      </p:sp>
+      <p:sp>
+        <p:nvSpPr>
+          <p:cNvPr id="7" name="CuadroTexto 6">
+            <a:hlinkClick r:id="rId3"/>
+            <a:extLst>
+              <a:ext uri="{FF2B5EF4-FFF2-40B4-BE49-F238E27FC236}">
+                <a16:creationId xmlns:a16="http://schemas.microsoft.com/office/drawing/2014/main" id="{29964766-4EF8-FEAD-2CB5-0E4D847C4AA9}"/>
+              </a:ext>
+            </a:extLst>
+          </p:cNvPr>
+          <p:cNvSpPr txBox="1"/>
+          <p:nvPr/>
+        </p:nvSpPr>
+        <p:spPr>
+          <a:xfrm>
+            <a:off x="513080" y="3638621"/>
+            <a:ext cx="9855200" cy="369332"/>
+          </a:xfrm>
+          <a:prstGeom prst="rect">
+            <a:avLst/>
+          </a:prstGeom>
+          <a:noFill/>
+        </p:spPr>
+        <p:txBody>
+          <a:bodyPr wrap="square">
+            <a:spAutoFit/>
+          </a:bodyPr>
+          <a:lstStyle/>
+          <a:p>
+            <a:r>
+              <a:rPr lang="es-MX" dirty="0">
+                <a:solidFill>
+                  <a:schemeClr val="bg1"/>
+                </a:solidFill>
+              </a:rPr>
+              <a:t>https://github.com/Cynthia21Morales/SIMULACION_CynthiaJasmineMT/tree/main/SIM-Tema-4/JAVA</a:t>
+            </a:r>
+          </a:p>
+        </p:txBody>
+      </p:sp>
+      <p:sp>
+        <p:nvSpPr>
+          <p:cNvPr id="8" name="CuadroTexto 7">
+            <a:extLst>
+              <a:ext uri="{FF2B5EF4-FFF2-40B4-BE49-F238E27FC236}">
+                <a16:creationId xmlns:a16="http://schemas.microsoft.com/office/drawing/2014/main" id="{F627A6BB-F40C-64FA-2F20-5B2AF4004E13}"/>
+              </a:ext>
+            </a:extLst>
+          </p:cNvPr>
+          <p:cNvSpPr txBox="1"/>
+          <p:nvPr/>
+        </p:nvSpPr>
+        <p:spPr>
+          <a:xfrm>
+            <a:off x="701040" y="3339624"/>
+            <a:ext cx="4607560" cy="369332"/>
+          </a:xfrm>
+          <a:prstGeom prst="rect">
+            <a:avLst/>
+          </a:prstGeom>
+          <a:noFill/>
+        </p:spPr>
+        <p:txBody>
+          <a:bodyPr wrap="square" rtlCol="0">
+            <a:spAutoFit/>
+          </a:bodyPr>
+          <a:lstStyle/>
+          <a:p>
+            <a:r>
+              <a:rPr lang="es-MX" dirty="0">
+                <a:solidFill>
+                  <a:schemeClr val="bg1"/>
+                </a:solidFill>
+              </a:rPr>
+              <a:t>java</a:t>
+            </a:r>
+          </a:p>
+        </p:txBody>
+      </p:sp>
+      <p:sp>
+        <p:nvSpPr>
+          <p:cNvPr id="10" name="CuadroTexto 9">
+            <a:hlinkClick r:id="rId4"/>
+            <a:extLst>
+              <a:ext uri="{FF2B5EF4-FFF2-40B4-BE49-F238E27FC236}">
+                <a16:creationId xmlns:a16="http://schemas.microsoft.com/office/drawing/2014/main" id="{BAF9C9C2-4E70-5733-75F4-5F0AD77BAC02}"/>
+              </a:ext>
+            </a:extLst>
+          </p:cNvPr>
+          <p:cNvSpPr txBox="1"/>
+          <p:nvPr/>
+        </p:nvSpPr>
+        <p:spPr>
+          <a:xfrm>
+            <a:off x="548640" y="4682933"/>
+            <a:ext cx="10241280" cy="369333"/>
+          </a:xfrm>
+          <a:prstGeom prst="rect">
+            <a:avLst/>
+          </a:prstGeom>
+          <a:noFill/>
+        </p:spPr>
+        <p:txBody>
+          <a:bodyPr wrap="square">
+            <a:spAutoFit/>
+          </a:bodyPr>
+          <a:lstStyle/>
+          <a:p>
+            <a:r>
+              <a:rPr lang="es-MX" dirty="0">
+                <a:solidFill>
+                  <a:schemeClr val="bg1"/>
+                </a:solidFill>
+              </a:rPr>
+              <a:t>https://github.com/Cynthia21Morales/SIMULACION_CynthiaJasmineMT/tree/main/SIM-Tema-4/PYTHON</a:t>
+            </a:r>
+          </a:p>
+        </p:txBody>
+      </p:sp>
+      <p:sp>
+        <p:nvSpPr>
+          <p:cNvPr id="11" name="CuadroTexto 10">
+            <a:extLst>
+              <a:ext uri="{FF2B5EF4-FFF2-40B4-BE49-F238E27FC236}">
+                <a16:creationId xmlns:a16="http://schemas.microsoft.com/office/drawing/2014/main" id="{7673E321-185D-9792-46E9-1270737D2E74}"/>
+              </a:ext>
+            </a:extLst>
+          </p:cNvPr>
+          <p:cNvSpPr txBox="1"/>
+          <p:nvPr/>
+        </p:nvSpPr>
+        <p:spPr>
+          <a:xfrm>
+            <a:off x="548640" y="5188254"/>
+            <a:ext cx="4607560" cy="369332"/>
+          </a:xfrm>
+          <a:prstGeom prst="rect">
+            <a:avLst/>
+          </a:prstGeom>
+          <a:noFill/>
+        </p:spPr>
+        <p:txBody>
+          <a:bodyPr wrap="square" rtlCol="0">
+            <a:spAutoFit/>
+          </a:bodyPr>
+          <a:lstStyle/>
+          <a:p>
+            <a:r>
+              <a:rPr lang="es-MX" dirty="0">
+                <a:solidFill>
+                  <a:schemeClr val="bg1"/>
+                </a:solidFill>
+              </a:rPr>
+              <a:t>R</a:t>
+            </a:r>
+          </a:p>
+        </p:txBody>
+      </p:sp>
+      <p:sp>
+        <p:nvSpPr>
+          <p:cNvPr id="13" name="CuadroTexto 12">
+            <a:hlinkClick r:id="rId5"/>
+            <a:extLst>
+              <a:ext uri="{FF2B5EF4-FFF2-40B4-BE49-F238E27FC236}">
+                <a16:creationId xmlns:a16="http://schemas.microsoft.com/office/drawing/2014/main" id="{48C08767-8653-EE3D-5B54-912566357B64}"/>
+              </a:ext>
+            </a:extLst>
+          </p:cNvPr>
+          <p:cNvSpPr txBox="1"/>
+          <p:nvPr/>
+        </p:nvSpPr>
+        <p:spPr>
+          <a:xfrm>
+            <a:off x="548640" y="5557586"/>
+            <a:ext cx="9743440" cy="369332"/>
+          </a:xfrm>
+          <a:prstGeom prst="rect">
+            <a:avLst/>
+          </a:prstGeom>
+          <a:noFill/>
+        </p:spPr>
+        <p:txBody>
+          <a:bodyPr wrap="square">
+            <a:spAutoFit/>
+          </a:bodyPr>
+          <a:lstStyle/>
+          <a:p>
+            <a:r>
+              <a:rPr lang="es-MX" dirty="0">
+                <a:solidFill>
+                  <a:schemeClr val="bg1"/>
+                </a:solidFill>
+              </a:rPr>
+              <a:t>https://github.com/Cynthia21Morales/SIMULACION_CynthiaJasmineMT/tree/main/SIM-Tema-4/R</a:t>
+            </a:r>
+          </a:p>
+        </p:txBody>
+      </p:sp>
+    </p:spTree>
+    <p:extLst>
+      <p:ext uri="{BB962C8B-B14F-4D97-AF65-F5344CB8AC3E}">
+        <p14:creationId xmlns:p14="http://schemas.microsoft.com/office/powerpoint/2010/main" val="2426783670"/>
+      </p:ext>
+    </p:extLst>
+  </p:cSld>
+  <p:clrMapOvr>
+    <a:masterClrMapping/>
+  </p:clrMapOvr>
+</p:sld>
+</file>
+
 <file path=ppt/slides/slide2.xml><?xml version="1.0" encoding="utf-8"?>
 <p:sld xmlns:a="http://schemas.openxmlformats.org/drawingml/2006/main" xmlns:r="http://schemas.openxmlformats.org/officeDocument/2006/relationships" xmlns:p="http://schemas.openxmlformats.org/presentationml/2006/main">
   <p:cSld name="Slide 1">
@@ -6526,7 +6930,7 @@
           </a:prstGeom>
           <a:extLst>
             <a:ext uri="{C572A759-6A51-4108-AA02-DFA0A04FC94B}">
-              <ma14:wrappingTextBoxFlag xmlns:ma14="http://schemas.microsoft.com/office/mac/drawingml/2011/main" xmlns="" val="0"/>
+              <ma14:wrappingTextBoxFlag xmlns="" xmlns:ma14="http://schemas.microsoft.com/office/mac/drawingml/2011/main" val="0"/>
             </a:ext>
           </a:extLst>
         </p:spPr>
@@ -7187,7 +7591,7 @@
           </a:prstGeom>
           <a:extLst>
             <a:ext uri="{C572A759-6A51-4108-AA02-DFA0A04FC94B}">
-              <ma14:wrappingTextBoxFlag xmlns:ma14="http://schemas.microsoft.com/office/mac/drawingml/2011/main" xmlns="" val="0"/>
+              <ma14:wrappingTextBoxFlag xmlns="" xmlns:ma14="http://schemas.microsoft.com/office/mac/drawingml/2011/main" val="0"/>
             </a:ext>
           </a:extLst>
         </p:spPr>
@@ -7881,7 +8285,7 @@
           </a:prstGeom>
           <a:extLst>
             <a:ext uri="{C572A759-6A51-4108-AA02-DFA0A04FC94B}">
-              <ma14:wrappingTextBoxFlag xmlns:ma14="http://schemas.microsoft.com/office/mac/drawingml/2011/main" xmlns="" val="0"/>
+              <ma14:wrappingTextBoxFlag xmlns="" xmlns:ma14="http://schemas.microsoft.com/office/mac/drawingml/2011/main" val="0"/>
             </a:ext>
           </a:extLst>
         </p:spPr>
@@ -8750,7 +9154,7 @@
           </a:prstGeom>
           <a:extLst>
             <a:ext uri="{C572A759-6A51-4108-AA02-DFA0A04FC94B}">
-              <ma14:wrappingTextBoxFlag xmlns:ma14="http://schemas.microsoft.com/office/mac/drawingml/2011/main" xmlns="" val="0"/>
+              <ma14:wrappingTextBoxFlag xmlns="" xmlns:ma14="http://schemas.microsoft.com/office/mac/drawingml/2011/main" val="0"/>
             </a:ext>
           </a:extLst>
         </p:spPr>
@@ -9444,7 +9848,7 @@
           </a:prstGeom>
           <a:extLst>
             <a:ext uri="{C572A759-6A51-4108-AA02-DFA0A04FC94B}">
-              <ma14:wrappingTextBoxFlag xmlns:ma14="http://schemas.microsoft.com/office/mac/drawingml/2011/main" xmlns="" val="0"/>
+              <ma14:wrappingTextBoxFlag xmlns="" xmlns:ma14="http://schemas.microsoft.com/office/mac/drawingml/2011/main" val="0"/>
             </a:ext>
           </a:extLst>
         </p:spPr>
@@ -10313,7 +10717,7 @@
           </a:prstGeom>
           <a:extLst>
             <a:ext uri="{C572A759-6A51-4108-AA02-DFA0A04FC94B}">
-              <ma14:wrappingTextBoxFlag xmlns:ma14="http://schemas.microsoft.com/office/mac/drawingml/2011/main" xmlns="" val="0"/>
+              <ma14:wrappingTextBoxFlag xmlns="" xmlns:ma14="http://schemas.microsoft.com/office/mac/drawingml/2011/main" val="0"/>
             </a:ext>
           </a:extLst>
         </p:spPr>
@@ -11007,7 +11411,7 @@
           </a:prstGeom>
           <a:extLst>
             <a:ext uri="{C572A759-6A51-4108-AA02-DFA0A04FC94B}">
-              <ma14:wrappingTextBoxFlag xmlns:ma14="http://schemas.microsoft.com/office/mac/drawingml/2011/main" xmlns="" val="0"/>
+              <ma14:wrappingTextBoxFlag xmlns="" xmlns:ma14="http://schemas.microsoft.com/office/mac/drawingml/2011/main" val="0"/>
             </a:ext>
           </a:extLst>
         </p:spPr>
